--- a/temp/87.pptx
+++ b/temp/87.pptx
@@ -705,8 +705,8 @@
         </p:nvSpPr>
         <p:spPr>
           <a:xfrm rot="0">
-            <a:off x="1800000" y="1620000"/>
-            <a:ext cx="5399280" cy="494820"/>
+            <a:off x="1800000" y="1480300"/>
+            <a:ext cx="5399280" cy="642827"/>
           </a:xfrm>
           <a:prstGeom prst="rect">
             <a:avLst/>
@@ -759,8 +759,8 @@
         </p:nvSpPr>
         <p:spPr>
           <a:xfrm rot="0">
-            <a:off x="1800000" y="2114820"/>
-            <a:ext cx="5399280" cy="494820"/>
+            <a:off x="1800000" y="2148527"/>
+            <a:ext cx="5399280" cy="642827"/>
           </a:xfrm>
           <a:prstGeom prst="rect">
             <a:avLst/>
@@ -813,8 +813,8 @@
         </p:nvSpPr>
         <p:spPr>
           <a:xfrm rot="0">
-            <a:off x="1800000" y="2609640"/>
-            <a:ext cx="5399280" cy="494820"/>
+            <a:off x="1800000" y="2816753"/>
+            <a:ext cx="5399280" cy="642827"/>
           </a:xfrm>
           <a:prstGeom prst="rect">
             <a:avLst/>
@@ -855,60 +855,6 @@
                 <a:latin typeface="Lato Black"/>
               </a:rPr>
               <a:t>test3</a:t>
-            </a:r>
-          </a:p>
-        </p:txBody>
-      </p:sp>
-      <p:sp>
-        <p:nvSpPr>
-          <p:cNvPr name="TextBox 7" id="7"/>
-          <p:cNvSpPr txBox="true"/>
-          <p:nvPr/>
-        </p:nvSpPr>
-        <p:spPr>
-          <a:xfrm rot="0">
-            <a:off x="1800000" y="3104460"/>
-            <a:ext cx="5399280" cy="494820"/>
-          </a:xfrm>
-          <a:prstGeom prst="rect">
-            <a:avLst/>
-          </a:prstGeom>
-          <a:noFill/>
-          <a:ln>
-            <a:noFill/>
-          </a:ln>
-        </p:spPr>
-        <p:txBody>
-          <a:bodyPr anchor="t" rtlCol="false" tIns="45000" lIns="90000" bIns="45000" rIns="90000" vert="horz">
-            <a:noAutofit/>
-          </a:bodyPr>
-          <a:lstStyle/>
-          <a:p>
-            <a:pPr algn="l">
-              <a:defRPr/>
-            </a:pPr>
-            <a:r>
-              <a:rPr lang="es-MX"/>
-              <a:t/>
-            </a:r>
-            <a:endParaRPr lang="en-US" sz="1100"/>
-          </a:p>
-          <a:p>
-            <a:pPr lvl="0">
-              <a:lnSpc>
-                <a:spcPct val="100000"/>
-              </a:lnSpc>
-              <a:buFont typeface=""/>
-              <a:buChar char=""/>
-            </a:pPr>
-            <a:r>
-              <a:rPr lang="en-US" b="false" i="false" u="none" sz="4000">
-                <a:solidFill>
-                  <a:srgbClr val="000000"/>
-                </a:solidFill>
-                <a:latin typeface="Lato Black"/>
-              </a:rPr>
-              <a:t>test4</a:t>
             </a:r>
           </a:p>
         </p:txBody>
